--- a/la présentation du projet de synthèse.pptx
+++ b/la présentation du projet de synthèse.pptx
@@ -268,7 +268,7 @@
             <a:pPr rtl="0"/>
             <a:fld id="{43367168-A7C3-4A51-ACFE-4D76B720982F}" type="datetime1">
               <a:rPr lang="fr-FR" smtClean="0"/>
-              <a:t>08/06/2026</a:t>
+              <a:t>11/06/2026</a:t>
             </a:fld>
             <a:endParaRPr lang="fr-FR"/>
           </a:p>
@@ -450,7 +450,7 @@
             <a:pPr rtl="0"/>
             <a:fld id="{CB4F1169-1988-463B-A52C-EF5C9A50040C}" type="datetime1">
               <a:rPr lang="fr-FR" noProof="0" smtClean="0"/>
-              <a:t>08/06/2026</a:t>
+              <a:t>11/06/2026</a:t>
             </a:fld>
             <a:endParaRPr lang="fr-FR" noProof="0"/>
           </a:p>
@@ -1262,7 +1262,7 @@
           <a:lstStyle/>
           <a:p>
             <a:pPr rtl="0"/>
-            <a:endParaRPr lang="fr-FR"/>
+            <a:endParaRPr lang="fr-FR" dirty="0"/>
           </a:p>
         </p:txBody>
       </p:sp>
@@ -1976,7 +1976,7 @@
             <a:pPr rtl="0"/>
             <a:fld id="{3F3B20A7-A3FE-46B9-84EA-B4257BA7E60C}" type="datetime1">
               <a:rPr lang="fr-FR" noProof="0" smtClean="0"/>
-              <a:t>08/06/2026</a:t>
+              <a:t>11/06/2026</a:t>
             </a:fld>
             <a:endParaRPr lang="fr-FR" noProof="0"/>
           </a:p>
@@ -2242,7 +2242,7 @@
             <a:pPr rtl="0"/>
             <a:fld id="{7E5E3FBB-57D2-4FB3-B51E-0FDE8CEE6791}" type="datetime1">
               <a:rPr lang="fr-FR" noProof="0" smtClean="0"/>
-              <a:t>08/06/2026</a:t>
+              <a:t>11/06/2026</a:t>
             </a:fld>
             <a:endParaRPr lang="fr-FR" noProof="0"/>
           </a:p>
@@ -2481,7 +2481,7 @@
             <a:pPr rtl="0"/>
             <a:fld id="{BE9F9435-70D7-42BA-8564-5EC34B97B69E}" type="datetime1">
               <a:rPr lang="fr-FR" noProof="0" smtClean="0"/>
-              <a:t>08/06/2026</a:t>
+              <a:t>11/06/2026</a:t>
             </a:fld>
             <a:endParaRPr lang="fr-FR" noProof="0"/>
           </a:p>
@@ -2732,7 +2732,7 @@
             <a:pPr rtl="0"/>
             <a:fld id="{29B34D2F-0B02-482E-ABD2-95D8C2FF2A58}" type="datetime1">
               <a:rPr lang="fr-FR" noProof="0" smtClean="0"/>
-              <a:t>08/06/2026</a:t>
+              <a:t>11/06/2026</a:t>
             </a:fld>
             <a:endParaRPr lang="fr-FR" noProof="0"/>
           </a:p>
@@ -3044,7 +3044,7 @@
             <a:pPr rtl="0"/>
             <a:fld id="{126ECFBB-4871-428F-B4AE-1EF357E63674}" type="datetime1">
               <a:rPr lang="fr-FR" noProof="0" smtClean="0"/>
-              <a:t>08/06/2026</a:t>
+              <a:t>11/06/2026</a:t>
             </a:fld>
             <a:endParaRPr lang="fr-FR" noProof="0"/>
           </a:p>
@@ -3356,7 +3356,7 @@
             <a:pPr rtl="0"/>
             <a:fld id="{75517F14-0D9C-452E-A596-36902551AE9C}" type="datetime1">
               <a:rPr lang="fr-FR" noProof="0" smtClean="0"/>
-              <a:t>08/06/2026</a:t>
+              <a:t>11/06/2026</a:t>
             </a:fld>
             <a:endParaRPr lang="fr-FR" noProof="0"/>
           </a:p>
@@ -3781,7 +3781,7 @@
             <a:pPr rtl="0"/>
             <a:fld id="{FA9BF800-A62B-4735-B9A7-5450007C0A78}" type="datetime1">
               <a:rPr lang="fr-FR" noProof="0" smtClean="0"/>
-              <a:t>08/06/2026</a:t>
+              <a:t>11/06/2026</a:t>
             </a:fld>
             <a:endParaRPr lang="fr-FR" noProof="0"/>
           </a:p>
@@ -3880,7 +3880,7 @@
             <a:pPr rtl="0"/>
             <a:fld id="{F47267E0-A979-4430-94B4-54611641D8EE}" type="datetime1">
               <a:rPr lang="fr-FR" noProof="0" smtClean="0"/>
-              <a:t>08/06/2026</a:t>
+              <a:t>11/06/2026</a:t>
             </a:fld>
             <a:endParaRPr lang="fr-FR" noProof="0"/>
           </a:p>
@@ -4047,7 +4047,7 @@
             <a:pPr rtl="0"/>
             <a:fld id="{C58A73B6-B077-488D-82CF-3056D5BAC73E}" type="datetime1">
               <a:rPr lang="fr-FR" noProof="0" smtClean="0"/>
-              <a:t>08/06/2026</a:t>
+              <a:t>11/06/2026</a:t>
             </a:fld>
             <a:endParaRPr lang="fr-FR" noProof="0"/>
           </a:p>
@@ -4429,7 +4429,7 @@
             <a:pPr rtl="0"/>
             <a:fld id="{98F108A3-3495-404B-9869-1BA62DF0E465}" type="datetime1">
               <a:rPr lang="fr-FR" noProof="0" smtClean="0"/>
-              <a:t>08/06/2026</a:t>
+              <a:t>11/06/2026</a:t>
             </a:fld>
             <a:endParaRPr lang="fr-FR" noProof="0"/>
           </a:p>
@@ -4723,7 +4723,7 @@
             <a:pPr rtl="0"/>
             <a:fld id="{94B550F6-4238-41AE-B6F4-4D375745C983}" type="datetime1">
               <a:rPr lang="fr-FR" noProof="0" smtClean="0"/>
-              <a:t>08/06/2026</a:t>
+              <a:t>11/06/2026</a:t>
             </a:fld>
             <a:endParaRPr lang="fr-FR" noProof="0"/>
           </a:p>
@@ -4937,7 +4937,7 @@
             <a:pPr rtl="0"/>
             <a:fld id="{BBB97F02-5EDD-4BF6-BE41-AB41D1FEABF8}" type="datetime1">
               <a:rPr lang="fr-FR" noProof="0" smtClean="0"/>
-              <a:t>08/06/2026</a:t>
+              <a:t>11/06/2026</a:t>
             </a:fld>
             <a:endParaRPr lang="fr-FR" noProof="0"/>
           </a:p>
@@ -7815,6 +7815,13 @@
   <p:clrMapOvr>
     <a:masterClrMapping/>
   </p:clrMapOvr>
+  <p:timing>
+    <p:tnLst>
+      <p:par>
+        <p:cTn id="1" dur="indefinite" restart="never" nodeType="tmRoot"/>
+      </p:par>
+    </p:tnLst>
+  </p:timing>
 </p:sld>
 </file>
 
@@ -7915,6 +7922,13 @@
   <p:clrMapOvr>
     <a:masterClrMapping/>
   </p:clrMapOvr>
+  <p:timing>
+    <p:tnLst>
+      <p:par>
+        <p:cTn id="1" dur="indefinite" restart="never" nodeType="tmRoot"/>
+      </p:par>
+    </p:tnLst>
+  </p:timing>
 </p:sld>
 </file>
 
@@ -8175,6 +8189,13 @@
   <p:clrMapOvr>
     <a:masterClrMapping/>
   </p:clrMapOvr>
+  <p:timing>
+    <p:tnLst>
+      <p:par>
+        <p:cTn id="1" dur="indefinite" restart="never" nodeType="tmRoot"/>
+      </p:par>
+    </p:tnLst>
+  </p:timing>
 </p:sld>
 </file>
 
@@ -8378,6 +8399,13 @@
   <p:clrMapOvr>
     <a:masterClrMapping/>
   </p:clrMapOvr>
+  <p:timing>
+    <p:tnLst>
+      <p:par>
+        <p:cTn id="1" dur="indefinite" restart="never" nodeType="tmRoot"/>
+      </p:par>
+    </p:tnLst>
+  </p:timing>
 </p:sld>
 </file>
 
@@ -8586,6 +8614,13 @@
   <p:clrMapOvr>
     <a:masterClrMapping/>
   </p:clrMapOvr>
+  <p:timing>
+    <p:tnLst>
+      <p:par>
+        <p:cTn id="1" dur="indefinite" restart="never" nodeType="tmRoot"/>
+      </p:par>
+    </p:tnLst>
+  </p:timing>
 </p:sld>
 </file>
 
@@ -8794,6 +8829,13 @@
   <p:clrMapOvr>
     <a:masterClrMapping/>
   </p:clrMapOvr>
+  <p:timing>
+    <p:tnLst>
+      <p:par>
+        <p:cTn id="1" dur="indefinite" restart="never" nodeType="tmRoot"/>
+      </p:par>
+    </p:tnLst>
+  </p:timing>
 </p:sld>
 </file>
 
@@ -8869,7 +8911,7 @@
         <p:spPr>
           <a:xfrm>
             <a:off x="354770" y="1873828"/>
-            <a:ext cx="11182364" cy="4801314"/>
+            <a:ext cx="11182364" cy="3970318"/>
           </a:xfrm>
           <a:prstGeom prst="rect">
             <a:avLst/>
@@ -8889,49 +8931,60 @@
             </a:pPr>
             <a:r>
               <a:rPr lang="fr-FR" sz="2400" b="1" dirty="0"/>
-              <a:t>Ce qui a été réussi</a:t>
-            </a:r>
-          </a:p>
-          <a:p>
-            <a:pPr algn="just">
+              <a:t>Ce qui a été </a:t>
+            </a:r>
+            <a:r>
+              <a:rPr lang="fr-FR" sz="2400" b="1" dirty="0" smtClean="0"/>
+              <a:t>réussi</a:t>
+            </a:r>
+          </a:p>
+          <a:p>
+            <a:pPr>
               <a:lnSpc>
                 <a:spcPct val="150000"/>
               </a:lnSpc>
             </a:pPr>
-            <a:r>
-              <a:rPr lang="fr-FR" sz="2000" dirty="0"/>
-              <a:t>Les principaux objectifs du projet ont été atteints avec succès</a:t>
-            </a:r>
-            <a:r>
-              <a:rPr lang="fr-FR" sz="2000" dirty="0" smtClean="0"/>
-              <a:t>. Nous </a:t>
-            </a:r>
-            <a:r>
-              <a:rPr lang="fr-FR" sz="2000" dirty="0"/>
-              <a:t>avons réussi à mettre en place un système d’authentification sécurisé avec une gestion des rôles permettant de distinguer les administrateurs, les parents et les formateurs.</a:t>
-            </a:r>
-          </a:p>
-          <a:p>
-            <a:pPr algn="just">
+            <a:endParaRPr lang="fr-FR" sz="2400" b="1" dirty="0"/>
+          </a:p>
+          <a:p>
+            <a:pPr>
               <a:lnSpc>
                 <a:spcPct val="150000"/>
               </a:lnSpc>
             </a:pPr>
             <a:r>
-              <a:rPr lang="fr-FR" sz="2000" dirty="0"/>
-              <a:t>L’application permet également la gestion des réservations ainsi que le suivi de leur statut. Les formateurs peuvent générer automatiquement des rapports pédagogiques au format PDF et les envoyer directement aux parents par courrier électronique grâce à l’intégration d’un serveur SMTP.</a:t>
-            </a:r>
-          </a:p>
-          <a:p>
-            <a:pPr algn="just">
-              <a:lnSpc>
-                <a:spcPct val="150000"/>
-              </a:lnSpc>
-            </a:pPr>
-            <a:r>
-              <a:rPr lang="fr-FR" sz="2000" dirty="0"/>
-              <a:t>Les rapports générés sont conservés dans un historique et peuvent être consultés ultérieurement. Les parents disposent également d’un espace personnel leur permettant de consulter leurs réservations et les rapports associés à leurs enfants.</a:t>
-            </a:r>
+              <a:rPr lang="fr-FR" sz="2400" dirty="0"/>
+              <a:t>• Authentification et gestion des rôles</a:t>
+            </a:r>
+            <a:br>
+              <a:rPr lang="fr-FR" sz="2400" dirty="0"/>
+            </a:br>
+            <a:r>
+              <a:rPr lang="fr-FR" sz="2400" dirty="0"/>
+              <a:t>• Gestion des réservations et des statuts</a:t>
+            </a:r>
+            <a:br>
+              <a:rPr lang="fr-FR" sz="2400" dirty="0"/>
+            </a:br>
+            <a:r>
+              <a:rPr lang="fr-FR" sz="2400" dirty="0"/>
+              <a:t>• Génération automatique des rapports PDF</a:t>
+            </a:r>
+            <a:br>
+              <a:rPr lang="fr-FR" sz="2400" dirty="0"/>
+            </a:br>
+            <a:r>
+              <a:rPr lang="fr-FR" sz="2400" dirty="0"/>
+              <a:t>• Envoi des rapports par email</a:t>
+            </a:r>
+            <a:br>
+              <a:rPr lang="fr-FR" sz="2400" dirty="0"/>
+            </a:br>
+            <a:r>
+              <a:rPr lang="fr-FR" sz="2400" dirty="0"/>
+              <a:t>• Historique des rapports et espace parent</a:t>
+            </a:r>
+            <a:endParaRPr lang="fr-FR" sz="2400" b="1" dirty="0"/>
           </a:p>
         </p:txBody>
       </p:sp>
@@ -8945,6 +8998,13 @@
   <p:clrMapOvr>
     <a:masterClrMapping/>
   </p:clrMapOvr>
+  <p:timing>
+    <p:tnLst>
+      <p:par>
+        <p:cTn id="1" dur="indefinite" restart="never" nodeType="tmRoot"/>
+      </p:par>
+    </p:tnLst>
+  </p:timing>
 </p:sld>
 </file>
 
@@ -9019,8 +9079,8 @@
         </p:nvSpPr>
         <p:spPr>
           <a:xfrm>
-            <a:off x="504818" y="1649266"/>
-            <a:ext cx="11544942" cy="5208734"/>
+            <a:off x="647058" y="2074935"/>
+            <a:ext cx="11544942" cy="4339650"/>
           </a:xfrm>
           <a:prstGeom prst="rect">
             <a:avLst/>
@@ -9051,8 +9111,20 @@
             </a:pPr>
             <a:r>
               <a:rPr lang="fr-FR" sz="2000" dirty="0"/>
-              <a:t>Plusieurs améliorations pourraient être apportées dans une future version de l’application :</a:t>
-            </a:r>
+              <a:t>Plusieurs améliorations pourraient être apportées dans une future version de l’application </a:t>
+            </a:r>
+            <a:r>
+              <a:rPr lang="fr-FR" sz="2000" dirty="0" smtClean="0"/>
+              <a:t>:</a:t>
+            </a:r>
+          </a:p>
+          <a:p>
+            <a:pPr algn="just">
+              <a:lnSpc>
+                <a:spcPct val="150000"/>
+              </a:lnSpc>
+            </a:pPr>
+            <a:endParaRPr lang="fr-FR" sz="2000" dirty="0" smtClean="0"/>
           </a:p>
           <a:p>
             <a:pPr marL="342900" indent="-342900" algn="just">
@@ -9060,11 +9132,15 @@
                 <a:spcPct val="150000"/>
               </a:lnSpc>
               <a:buFont typeface="Wingdings" panose="05000000000000000000" pitchFamily="2" charset="2"/>
-              <a:buChar char="Ø"/>
+              <a:buChar char="§"/>
             </a:pPr>
             <a:r>
               <a:rPr lang="fr-FR" sz="2000" dirty="0"/>
-              <a:t> Mettre en place un contrôle plus avancé du processus de réservation afin qu’un atelier ne soit visible pour le formateur qu’après validation de l’administrateur</a:t>
+              <a:t>Paiement en </a:t>
+            </a:r>
+            <a:r>
+              <a:rPr lang="fr-FR" sz="2000" dirty="0" smtClean="0"/>
+              <a:t>ligne</a:t>
             </a:r>
           </a:p>
           <a:p>
@@ -9073,11 +9149,19 @@
                 <a:spcPct val="150000"/>
               </a:lnSpc>
               <a:buFont typeface="Wingdings" panose="05000000000000000000" pitchFamily="2" charset="2"/>
-              <a:buChar char="Ø"/>
+              <a:buChar char="§"/>
             </a:pPr>
             <a:r>
+              <a:rPr lang="fr-FR" sz="2000" dirty="0" smtClean="0"/>
+              <a:t>Annulation </a:t>
+            </a:r>
+            <a:r>
               <a:rPr lang="fr-FR" sz="2000" dirty="0"/>
-              <a:t> Permettre aux parents d’annuler une réservation directement depuis leur espace personnel.- </a:t>
+              <a:t>des réservations par les </a:t>
+            </a:r>
+            <a:r>
+              <a:rPr lang="fr-FR" sz="2000" dirty="0" smtClean="0"/>
+              <a:t>parents</a:t>
             </a:r>
           </a:p>
           <a:p>
@@ -9086,11 +9170,19 @@
                 <a:spcPct val="150000"/>
               </a:lnSpc>
               <a:buFont typeface="Wingdings" panose="05000000000000000000" pitchFamily="2" charset="2"/>
-              <a:buChar char="Ø"/>
+              <a:buChar char="§"/>
             </a:pPr>
             <a:r>
+              <a:rPr lang="fr-FR" sz="2000" dirty="0" smtClean="0"/>
+              <a:t>Gestion </a:t>
+            </a:r>
+            <a:r>
               <a:rPr lang="fr-FR" sz="2000" dirty="0"/>
-              <a:t>Autoriser la gestion de plusieurs élèves à partir d’un seul compte parent.- </a:t>
+              <a:t>de plusieurs enfants par </a:t>
+            </a:r>
+            <a:r>
+              <a:rPr lang="fr-FR" sz="2000" dirty="0" smtClean="0"/>
+              <a:t>un seule parent</a:t>
             </a:r>
           </a:p>
           <a:p>
@@ -9099,11 +9191,19 @@
                 <a:spcPct val="150000"/>
               </a:lnSpc>
               <a:buFont typeface="Wingdings" panose="05000000000000000000" pitchFamily="2" charset="2"/>
-              <a:buChar char="Ø"/>
+              <a:buChar char="§"/>
             </a:pPr>
             <a:r>
+              <a:rPr lang="fr-FR" sz="2000" dirty="0" smtClean="0"/>
+              <a:t> </a:t>
+            </a:r>
+            <a:r>
               <a:rPr lang="fr-FR" sz="2000" dirty="0"/>
-              <a:t>Intégrer un système de paiement en ligne.- </a:t>
+              <a:t>Notifications </a:t>
+            </a:r>
+            <a:r>
+              <a:rPr lang="fr-FR" sz="2000" dirty="0" smtClean="0"/>
+              <a:t>automatiques</a:t>
             </a:r>
           </a:p>
           <a:p>
@@ -9112,11 +9212,19 @@
                 <a:spcPct val="150000"/>
               </a:lnSpc>
               <a:buFont typeface="Wingdings" panose="05000000000000000000" pitchFamily="2" charset="2"/>
-              <a:buChar char="Ø"/>
+              <a:buChar char="§"/>
             </a:pPr>
             <a:r>
-              <a:rPr lang="fr-FR" sz="2000" dirty="0"/>
-              <a:t>Ajouter un système de notifications automatiques pour informer les parents de la validation ou du refus de leurs réservations.-</a:t>
+              <a:rPr lang="fr-FR" sz="2000" dirty="0" smtClean="0"/>
+              <a:t>Chaque formateur doit </a:t>
+            </a:r>
+            <a:r>
+              <a:rPr lang="fr-FR" sz="2000" dirty="0" err="1" smtClean="0"/>
+              <a:t>posséde</a:t>
+            </a:r>
+            <a:r>
+              <a:rPr lang="fr-FR" sz="2000" dirty="0" smtClean="0"/>
+              <a:t> juste ses propres atelier </a:t>
             </a:r>
           </a:p>
           <a:p>
@@ -9125,24 +9233,31 @@
                 <a:spcPct val="150000"/>
               </a:lnSpc>
               <a:buFont typeface="Wingdings" panose="05000000000000000000" pitchFamily="2" charset="2"/>
-              <a:buChar char="Ø"/>
+              <a:buChar char="§"/>
             </a:pPr>
             <a:r>
-              <a:rPr lang="fr-FR" sz="2000" dirty="0"/>
-              <a:t> Améliorer la gestion des formateurs afin que chacun accède uniquement aux ateliers qui lui sont attribués.</a:t>
-            </a:r>
-          </a:p>
-          <a:p>
-            <a:pPr marL="342900" indent="-342900" algn="just">
-              <a:lnSpc>
-                <a:spcPct val="150000"/>
-              </a:lnSpc>
-              <a:buFont typeface="Wingdings" panose="05000000000000000000" pitchFamily="2" charset="2"/>
-              <a:buChar char="Ø"/>
-            </a:pPr>
-            <a:r>
-              <a:rPr lang="fr-FR" sz="2000" dirty="0"/>
-              <a:t>Ajouter des tableaux de bord statistiques et des outils de suivi plus avancés.</a:t>
+              <a:rPr lang="fr-FR" sz="2000" dirty="0" err="1" smtClean="0"/>
+              <a:t>UtilisaGénération</a:t>
+            </a:r>
+            <a:r>
+              <a:rPr lang="fr-FR" sz="2000" dirty="0" smtClean="0"/>
+              <a:t> des </a:t>
+            </a:r>
+            <a:r>
+              <a:rPr lang="fr-FR" sz="2000" dirty="0" err="1" smtClean="0"/>
+              <a:t>rappoorts</a:t>
+            </a:r>
+            <a:r>
+              <a:rPr lang="fr-FR" sz="2000" dirty="0" smtClean="0"/>
+              <a:t> par </a:t>
+            </a:r>
+            <a:r>
+              <a:rPr lang="fr-FR" sz="2000" dirty="0" err="1" smtClean="0"/>
+              <a:t>plusiers</a:t>
+            </a:r>
+            <a:r>
+              <a:rPr lang="fr-FR" sz="2000" dirty="0" smtClean="0"/>
+              <a:t> formateur au lieu d’n seule </a:t>
             </a:r>
           </a:p>
         </p:txBody>
@@ -9157,6 +9272,13 @@
   <p:clrMapOvr>
     <a:masterClrMapping/>
   </p:clrMapOvr>
+  <p:timing>
+    <p:tnLst>
+      <p:par>
+        <p:cTn id="1" dur="indefinite" restart="never" nodeType="tmRoot"/>
+      </p:par>
+    </p:tnLst>
+  </p:timing>
 </p:sld>
 </file>
 
@@ -9232,7 +9354,7 @@
         <p:spPr>
           <a:xfrm>
             <a:off x="422443" y="1649266"/>
-            <a:ext cx="11280782" cy="5208734"/>
+            <a:ext cx="11280782" cy="4801314"/>
           </a:xfrm>
           <a:prstGeom prst="rect">
             <a:avLst/>
@@ -9263,99 +9385,135 @@
             </a:pPr>
             <a:r>
               <a:rPr lang="fr-FR" sz="2000" dirty="0"/>
-              <a:t>La réalisation de ce projet m’a permis de développer plusieurs compétences techniques et méthodologiques :</a:t>
-            </a:r>
-          </a:p>
-          <a:p>
-            <a:pPr marL="342900" indent="-342900" algn="just">
+              <a:t>La réalisation de ce projet m’a permis de développer plusieurs compétences techniques et méthodologiques </a:t>
+            </a:r>
+            <a:r>
+              <a:rPr lang="fr-FR" sz="2000" dirty="0" smtClean="0"/>
+              <a:t>:</a:t>
+            </a:r>
+          </a:p>
+          <a:p>
+            <a:pPr algn="just">
               <a:lnSpc>
                 <a:spcPct val="150000"/>
               </a:lnSpc>
-              <a:buFont typeface="Wingdings" panose="05000000000000000000" pitchFamily="2" charset="2"/>
-              <a:buChar char="Ø"/>
             </a:pPr>
-            <a:r>
-              <a:rPr lang="fr-FR" sz="2000" dirty="0"/>
-              <a:t>Analyse des besoins et compréhension d’un cahier des charges.-</a:t>
-            </a:r>
-          </a:p>
-          <a:p>
-            <a:pPr marL="342900" indent="-342900" algn="just">
+            <a:endParaRPr lang="fr-FR" sz="2000" dirty="0" smtClean="0"/>
+          </a:p>
+          <a:p>
+            <a:pPr algn="just">
               <a:lnSpc>
                 <a:spcPct val="150000"/>
               </a:lnSpc>
-              <a:buFont typeface="Wingdings" panose="05000000000000000000" pitchFamily="2" charset="2"/>
-              <a:buChar char="Ø"/>
             </a:pPr>
             <a:r>
               <a:rPr lang="fr-FR" sz="2000" dirty="0"/>
-              <a:t> Conception et gestion d’une base de données relationnelle.</a:t>
-            </a:r>
-          </a:p>
-          <a:p>
-            <a:pPr marL="342900" indent="-342900" algn="just">
+              <a:t>• Analyse des </a:t>
+            </a:r>
+            <a:r>
+              <a:rPr lang="fr-FR" sz="2000" dirty="0" smtClean="0"/>
+              <a:t>besoins</a:t>
+            </a:r>
+          </a:p>
+          <a:p>
+            <a:pPr algn="just">
               <a:lnSpc>
                 <a:spcPct val="150000"/>
               </a:lnSpc>
-              <a:buFont typeface="Wingdings" panose="05000000000000000000" pitchFamily="2" charset="2"/>
-              <a:buChar char="Ø"/>
             </a:pPr>
             <a:r>
+              <a:rPr lang="fr-FR" sz="2000" dirty="0" smtClean="0"/>
+              <a:t>• </a:t>
+            </a:r>
+            <a:r>
               <a:rPr lang="fr-FR" sz="2000" dirty="0"/>
-              <a:t> Mise en place de l’authentification et de la gestion des rôles.-</a:t>
-            </a:r>
-          </a:p>
-          <a:p>
-            <a:pPr marL="342900" indent="-342900" algn="just">
+              <a:t>Conception de base de </a:t>
+            </a:r>
+            <a:r>
+              <a:rPr lang="fr-FR" sz="2000" dirty="0" smtClean="0"/>
+              <a:t>données</a:t>
+            </a:r>
+          </a:p>
+          <a:p>
+            <a:pPr algn="just">
               <a:lnSpc>
                 <a:spcPct val="150000"/>
               </a:lnSpc>
-              <a:buFont typeface="Wingdings" panose="05000000000000000000" pitchFamily="2" charset="2"/>
-              <a:buChar char="Ø"/>
             </a:pPr>
             <a:r>
+              <a:rPr lang="fr-FR" sz="2000" dirty="0" smtClean="0"/>
+              <a:t>• </a:t>
+            </a:r>
+            <a:r>
+              <a:rPr lang="fr-FR" sz="2000" dirty="0" err="1"/>
+              <a:t>Laravel</a:t>
+            </a:r>
+            <a:r>
               <a:rPr lang="fr-FR" sz="2000" dirty="0"/>
-              <a:t> Génération automatique de documents PDF.- Intégration et configuration d’un service SMTP pour l’envoi des emails.-</a:t>
-            </a:r>
-          </a:p>
-          <a:p>
-            <a:pPr marL="342900" indent="-342900" algn="just">
+              <a:t> et architecture </a:t>
+            </a:r>
+            <a:r>
+              <a:rPr lang="fr-FR" sz="2000" dirty="0" smtClean="0"/>
+              <a:t>MVC</a:t>
+            </a:r>
+          </a:p>
+          <a:p>
+            <a:pPr algn="just">
               <a:lnSpc>
                 <a:spcPct val="150000"/>
               </a:lnSpc>
-              <a:buFont typeface="Wingdings" panose="05000000000000000000" pitchFamily="2" charset="2"/>
-              <a:buChar char="Ø"/>
             </a:pPr>
             <a:r>
+              <a:rPr lang="fr-FR" sz="2000" dirty="0" smtClean="0"/>
+              <a:t>• </a:t>
+            </a:r>
+            <a:r>
               <a:rPr lang="fr-FR" sz="2000" dirty="0"/>
-              <a:t> Utilisation de Git et GitHub pour la gestion du code source.- </a:t>
-            </a:r>
-          </a:p>
-          <a:p>
-            <a:pPr marL="342900" indent="-342900" algn="just">
+              <a:t>Génération de </a:t>
+            </a:r>
+            <a:r>
+              <a:rPr lang="fr-FR" sz="2000" dirty="0" smtClean="0"/>
+              <a:t>PDF</a:t>
+            </a:r>
+          </a:p>
+          <a:p>
+            <a:pPr algn="just">
               <a:lnSpc>
                 <a:spcPct val="150000"/>
               </a:lnSpc>
-              <a:buFont typeface="Wingdings" panose="05000000000000000000" pitchFamily="2" charset="2"/>
-              <a:buChar char="Ø"/>
             </a:pPr>
             <a:r>
+              <a:rPr lang="fr-FR" sz="2000" dirty="0" smtClean="0"/>
+              <a:t>• </a:t>
+            </a:r>
+            <a:r>
               <a:rPr lang="fr-FR" sz="2000" dirty="0"/>
-              <a:t>Travail collaboratif et résolution de problèmes techniques.- </a:t>
-            </a:r>
-          </a:p>
-          <a:p>
-            <a:pPr marL="342900" indent="-342900" algn="just">
+              <a:t>Envoi d’emails avec </a:t>
+            </a:r>
+            <a:r>
+              <a:rPr lang="fr-FR" sz="2000" dirty="0" smtClean="0"/>
+              <a:t>SMTP</a:t>
+            </a:r>
+          </a:p>
+          <a:p>
+            <a:pPr algn="just">
               <a:lnSpc>
                 <a:spcPct val="150000"/>
               </a:lnSpc>
-              <a:buFont typeface="Wingdings" panose="05000000000000000000" pitchFamily="2" charset="2"/>
-              <a:buChar char="Ø"/>
             </a:pPr>
             <a:r>
+              <a:rPr lang="fr-FR" sz="2000" dirty="0" smtClean="0"/>
+              <a:t>• </a:t>
+            </a:r>
+            <a:r>
               <a:rPr lang="fr-FR" sz="2000" dirty="0"/>
-              <a:t>Développement d’une application web suivant l’architecture MVC.</a:t>
-            </a:r>
+              <a:t>Git et </a:t>
+            </a:r>
+            <a:r>
+              <a:rPr lang="fr-FR" sz="2000" dirty="0" err="1" smtClean="0"/>
+              <a:t>GitHub</a:t>
+            </a:r>
+            <a:endParaRPr lang="fr-FR" sz="2000" dirty="0"/>
           </a:p>
         </p:txBody>
       </p:sp>
@@ -9369,6 +9527,13 @@
   <p:clrMapOvr>
     <a:masterClrMapping/>
   </p:clrMapOvr>
+  <p:timing>
+    <p:tnLst>
+      <p:par>
+        <p:cTn id="1" dur="indefinite" restart="never" nodeType="tmRoot"/>
+      </p:par>
+    </p:tnLst>
+  </p:timing>
 </p:sld>
 </file>
 
@@ -9591,6 +9756,13 @@
   <p:clrMapOvr>
     <a:masterClrMapping/>
   </p:clrMapOvr>
+  <p:timing>
+    <p:tnLst>
+      <p:par>
+        <p:cTn id="1" dur="indefinite" restart="never" nodeType="tmRoot"/>
+      </p:par>
+    </p:tnLst>
+  </p:timing>
 </p:sld>
 </file>
 
@@ -10098,6 +10270,13 @@
   <p:clrMapOvr>
     <a:masterClrMapping/>
   </p:clrMapOvr>
+  <p:timing>
+    <p:tnLst>
+      <p:par>
+        <p:cTn id="1" dur="indefinite" restart="never" nodeType="tmRoot"/>
+      </p:par>
+    </p:tnLst>
+  </p:timing>
 </p:sld>
 </file>
 
@@ -10524,22 +10703,13 @@
               <a:buNone/>
             </a:pPr>
             <a:r>
-              <a:rPr lang="fr-FR" altLang="fr-FR" sz="2000" dirty="0">
+              <a:rPr lang="fr-FR" altLang="fr-FR" sz="2000" dirty="0" smtClean="0">
                 <a:solidFill>
                   <a:schemeClr val="tx1"/>
                 </a:solidFill>
                 <a:latin typeface="Arial" panose="020B0604020202020204" pitchFamily="34" charset="0"/>
               </a:rPr>
-              <a:t>Présentation générale du </a:t>
-            </a:r>
-            <a:r>
-              <a:rPr lang="fr-FR" altLang="fr-FR" sz="2000" dirty="0" smtClean="0">
-                <a:solidFill>
-                  <a:schemeClr val="tx1"/>
-                </a:solidFill>
-                <a:latin typeface="Arial" panose="020B0604020202020204" pitchFamily="34" charset="0"/>
-              </a:rPr>
-              <a:t>projet Dans </a:t>
+              <a:t>Dans </a:t>
             </a:r>
             <a:r>
               <a:rPr lang="fr-FR" altLang="fr-FR" sz="2000" dirty="0">
@@ -10584,16 +10754,34 @@
                 </a:solidFill>
                 <a:latin typeface="Arial" panose="020B0604020202020204" pitchFamily="34" charset="0"/>
               </a:rPr>
-              <a:t> afin de faciliter la gestion des ateliers et le suivi pédagogique des </a:t>
-            </a:r>
-            <a:r>
-              <a:rPr lang="fr-FR" altLang="fr-FR" sz="2000" dirty="0" err="1">
+              <a:t> afin de </a:t>
+            </a:r>
+            <a:r>
+              <a:rPr lang="fr-FR" altLang="fr-FR" sz="2000" b="1" dirty="0">
                 <a:solidFill>
                   <a:schemeClr val="tx1"/>
                 </a:solidFill>
                 <a:latin typeface="Arial" panose="020B0604020202020204" pitchFamily="34" charset="0"/>
               </a:rPr>
-              <a:t>élèves.L’idée</a:t>
+              <a:t>faciliter la gestion des ateliers et le suivi pédagogique des </a:t>
+            </a:r>
+            <a:r>
+              <a:rPr lang="fr-FR" altLang="fr-FR" sz="2000" b="1" dirty="0" err="1">
+                <a:solidFill>
+                  <a:schemeClr val="tx1"/>
+                </a:solidFill>
+                <a:latin typeface="Arial" panose="020B0604020202020204" pitchFamily="34" charset="0"/>
+              </a:rPr>
+              <a:t>élèves</a:t>
+            </a:r>
+            <a:r>
+              <a:rPr lang="fr-FR" altLang="fr-FR" sz="2000" dirty="0" err="1">
+                <a:solidFill>
+                  <a:schemeClr val="tx1"/>
+                </a:solidFill>
+                <a:latin typeface="Arial" panose="020B0604020202020204" pitchFamily="34" charset="0"/>
+              </a:rPr>
+              <a:t>.L’idée</a:t>
             </a:r>
             <a:r>
               <a:rPr lang="fr-FR" altLang="fr-FR" sz="2000" dirty="0">
@@ -10620,7 +10808,61 @@
                 </a:solidFill>
                 <a:latin typeface="Arial" panose="020B0604020202020204" pitchFamily="34" charset="0"/>
               </a:rPr>
-              <a:t>permet aux parents de réserver des ateliers en ligne, aux administrateurs de gérer les demandes de réservation et aux formateurs de générer des rapports pédagogiques au format PDF qui peuvent être envoyés automatiquement aux parents par courrier électronique.</a:t>
+              <a:t>permet aux </a:t>
+            </a:r>
+            <a:r>
+              <a:rPr lang="fr-FR" altLang="fr-FR" sz="2000" b="1" dirty="0">
+                <a:solidFill>
+                  <a:schemeClr val="tx1"/>
+                </a:solidFill>
+                <a:latin typeface="Arial" panose="020B0604020202020204" pitchFamily="34" charset="0"/>
+              </a:rPr>
+              <a:t>parents de réserver des ateliers en ligne</a:t>
+            </a:r>
+            <a:r>
+              <a:rPr lang="fr-FR" altLang="fr-FR" sz="2000" dirty="0">
+                <a:solidFill>
+                  <a:schemeClr val="tx1"/>
+                </a:solidFill>
+                <a:latin typeface="Arial" panose="020B0604020202020204" pitchFamily="34" charset="0"/>
+              </a:rPr>
+              <a:t>, aux </a:t>
+            </a:r>
+            <a:r>
+              <a:rPr lang="fr-FR" altLang="fr-FR" sz="2000" b="1" dirty="0">
+                <a:solidFill>
+                  <a:schemeClr val="tx1"/>
+                </a:solidFill>
+                <a:latin typeface="Arial" panose="020B0604020202020204" pitchFamily="34" charset="0"/>
+              </a:rPr>
+              <a:t>administrateurs de gérer les demandes de réservation</a:t>
+            </a:r>
+            <a:r>
+              <a:rPr lang="fr-FR" altLang="fr-FR" sz="2000" dirty="0">
+                <a:solidFill>
+                  <a:schemeClr val="tx1"/>
+                </a:solidFill>
+                <a:latin typeface="Arial" panose="020B0604020202020204" pitchFamily="34" charset="0"/>
+              </a:rPr>
+              <a:t> et aux </a:t>
+            </a:r>
+            <a:r>
+              <a:rPr lang="fr-FR" altLang="fr-FR" sz="2000" b="1" dirty="0">
+                <a:solidFill>
+                  <a:schemeClr val="tx1"/>
+                </a:solidFill>
+                <a:latin typeface="Arial" panose="020B0604020202020204" pitchFamily="34" charset="0"/>
+              </a:rPr>
+              <a:t>formateurs de générer des rapports pédagogiques </a:t>
+            </a:r>
+            <a:r>
+              <a:rPr lang="fr-FR" altLang="fr-FR" sz="2000" dirty="0">
+                <a:solidFill>
+                  <a:schemeClr val="tx1"/>
+                </a:solidFill>
+                <a:latin typeface="Arial" panose="020B0604020202020204" pitchFamily="34" charset="0"/>
+              </a:rPr>
+              <a:t>au format PDF qui peuvent être envoyés automatiquement aux parents par courrier électronique.</a:t>
             </a:r>
             <a:endParaRPr kumimoji="0" lang="fr-FR" altLang="fr-FR" sz="2000" i="0" u="none" strike="noStrike" cap="none" normalizeH="0" baseline="0" dirty="0">
               <a:ln>
@@ -10644,6 +10886,13 @@
   <p:clrMapOvr>
     <a:masterClrMapping/>
   </p:clrMapOvr>
+  <p:timing>
+    <p:tnLst>
+      <p:par>
+        <p:cTn id="1" dur="indefinite" restart="never" nodeType="tmRoot"/>
+      </p:par>
+    </p:tnLst>
+  </p:timing>
 </p:sld>
 </file>
 
@@ -10729,8 +10978,8 @@
         </p:nvSpPr>
         <p:spPr bwMode="auto">
           <a:xfrm>
-            <a:off x="720089" y="1740618"/>
-            <a:ext cx="10229562" cy="5113644"/>
+            <a:off x="720089" y="2635447"/>
+            <a:ext cx="10229562" cy="3323987"/>
           </a:xfrm>
           <a:prstGeom prst="rect">
             <a:avLst/>
@@ -10800,11 +11049,20 @@
                 </a:solidFill>
                 <a:latin typeface="Arial" panose="020B0604020202020204" pitchFamily="34" charset="0"/>
               </a:rPr>
-              <a:t>Pourquoi ce projet ?</a:t>
-            </a:r>
-          </a:p>
-          <a:p>
-            <a:pPr marL="0" lvl="0" indent="0" defTabSz="914400" eaLnBrk="0" fontAlgn="base" hangingPunct="0">
+              <a:t>Pourquoi ce projet </a:t>
+            </a:r>
+            <a:r>
+              <a:rPr lang="fr-FR" altLang="fr-FR" sz="2000" b="1" dirty="0" smtClean="0">
+                <a:solidFill>
+                  <a:schemeClr val="tx1"/>
+                </a:solidFill>
+                <a:latin typeface="Arial" panose="020B0604020202020204" pitchFamily="34" charset="0"/>
+              </a:rPr>
+              <a:t>?</a:t>
+            </a:r>
+          </a:p>
+          <a:p>
+            <a:pPr marL="0" indent="0" defTabSz="914400" eaLnBrk="0" fontAlgn="base" hangingPunct="0">
               <a:lnSpc>
                 <a:spcPct val="150000"/>
               </a:lnSpc>
@@ -10818,55 +11076,241 @@
               <a:buSzTx/>
               <a:buNone/>
             </a:pPr>
-            <a:r>
-              <a:rPr lang="fr-FR" altLang="fr-FR" sz="2000" dirty="0">
+            <a:endParaRPr lang="fr-FR" altLang="fr-FR" sz="2000" b="1" dirty="0" smtClean="0">
+              <a:solidFill>
+                <a:schemeClr val="tx1"/>
+              </a:solidFill>
+              <a:latin typeface="Arial" panose="020B0604020202020204" pitchFamily="34" charset="0"/>
+            </a:endParaRPr>
+          </a:p>
+          <a:p>
+            <a:pPr defTabSz="914400" eaLnBrk="0" fontAlgn="base" hangingPunct="0">
+              <a:lnSpc>
+                <a:spcPct val="150000"/>
+              </a:lnSpc>
+              <a:spcBef>
+                <a:spcPct val="0"/>
+              </a:spcBef>
+              <a:spcAft>
+                <a:spcPct val="0"/>
+              </a:spcAft>
+              <a:buClrTx/>
+              <a:buSzTx/>
+            </a:pPr>
+            <a:r>
+              <a:rPr lang="fr-FR" altLang="fr-FR" sz="2000" dirty="0" smtClean="0">
                 <a:solidFill>
                   <a:schemeClr val="tx1"/>
                 </a:solidFill>
                 <a:latin typeface="Arial" panose="020B0604020202020204" pitchFamily="34" charset="0"/>
               </a:rPr>
-              <a:t>Avant la mise en place de cette solution, les inscriptions aux ateliers étaient principalement gérées via WhatsApp et sur papier. Les rapports pédagogiques étaient rédigés manuellement, ce qui pouvait entraîner une perte d’informations, un manque de centralisation et un temps de traitement </a:t>
-            </a:r>
-            <a:r>
-              <a:rPr lang="fr-FR" altLang="fr-FR" sz="2000" dirty="0" err="1">
+              <a:t>Répondre </a:t>
+            </a:r>
+            <a:r>
+              <a:rPr lang="fr-FR" altLang="fr-FR" sz="2000" dirty="0">
                 <a:solidFill>
                   <a:schemeClr val="tx1"/>
                 </a:solidFill>
                 <a:latin typeface="Arial" panose="020B0604020202020204" pitchFamily="34" charset="0"/>
               </a:rPr>
-              <a:t>important.Ce</a:t>
-            </a:r>
-            <a:r>
-              <a:rPr lang="fr-FR" altLang="fr-FR" sz="2000" dirty="0">
+              <a:t>à un besoin réel exprimé par Elite </a:t>
+            </a:r>
+            <a:r>
+              <a:rPr lang="fr-FR" altLang="fr-FR" sz="2000" dirty="0" err="1">
                 <a:solidFill>
                   <a:schemeClr val="tx1"/>
                 </a:solidFill>
                 <a:latin typeface="Arial" panose="020B0604020202020204" pitchFamily="34" charset="0"/>
               </a:rPr>
-              <a:t> projet a été réalisé afin de moderniser ces processus en proposant une plateforme unique permettant de centraliser les données administratives et pédagogiques, d'améliorer la communication avec les parents et de simplifier le suivi des </a:t>
-            </a:r>
-            <a:r>
-              <a:rPr lang="fr-FR" altLang="fr-FR" sz="2000" dirty="0" err="1">
+              <a:t>Coders</a:t>
+            </a:r>
+            <a:r>
+              <a:rPr lang="fr-FR" altLang="fr-FR" sz="2000" dirty="0">
                 <a:solidFill>
                   <a:schemeClr val="tx1"/>
                 </a:solidFill>
                 <a:latin typeface="Arial" panose="020B0604020202020204" pitchFamily="34" charset="0"/>
               </a:rPr>
-              <a:t>élèves.La</a:t>
-            </a:r>
-            <a:r>
-              <a:rPr lang="fr-FR" altLang="fr-FR" sz="2000" dirty="0">
+              <a:t> </a:t>
+            </a:r>
+            <a:r>
+              <a:rPr lang="fr-FR" altLang="fr-FR" sz="2000" dirty="0" err="1">
                 <a:solidFill>
                   <a:schemeClr val="tx1"/>
                 </a:solidFill>
                 <a:latin typeface="Arial" panose="020B0604020202020204" pitchFamily="34" charset="0"/>
               </a:rPr>
-              <a:t> réservation en ligne ainsi que l’automatisation de l’envoi des rapports PDF représentent les fonctionnalités les plus importantes du système, car elles permettent un gain de temps considérable pour les utilisateurs.</a:t>
-            </a:r>
-            <a:endParaRPr kumimoji="0" lang="fr-FR" altLang="fr-FR" sz="2000" i="0" u="none" strike="noStrike" cap="none" normalizeH="0" baseline="0" dirty="0">
-              <a:ln>
-                <a:noFill/>
-              </a:ln>
+              <a:t>Academy</a:t>
+            </a:r>
+            <a:r>
+              <a:rPr lang="fr-FR" altLang="fr-FR" sz="2000" dirty="0" smtClean="0">
+                <a:solidFill>
+                  <a:schemeClr val="tx1"/>
+                </a:solidFill>
+                <a:latin typeface="Arial" panose="020B0604020202020204" pitchFamily="34" charset="0"/>
+              </a:rPr>
+              <a:t>.</a:t>
+            </a:r>
+          </a:p>
+          <a:p>
+            <a:pPr defTabSz="914400" eaLnBrk="0" fontAlgn="base" hangingPunct="0">
+              <a:lnSpc>
+                <a:spcPct val="150000"/>
+              </a:lnSpc>
+              <a:spcBef>
+                <a:spcPct val="0"/>
+              </a:spcBef>
+              <a:spcAft>
+                <a:spcPct val="0"/>
+              </a:spcAft>
+              <a:buClrTx/>
+              <a:buSzTx/>
+            </a:pPr>
+            <a:r>
+              <a:rPr lang="fr-FR" altLang="fr-FR" sz="2000" dirty="0" smtClean="0">
+                <a:solidFill>
+                  <a:schemeClr val="tx1"/>
+                </a:solidFill>
+                <a:latin typeface="Arial" panose="020B0604020202020204" pitchFamily="34" charset="0"/>
+              </a:rPr>
+              <a:t> </a:t>
+            </a:r>
+            <a:r>
+              <a:rPr lang="fr-FR" altLang="fr-FR" sz="2000" dirty="0">
+                <a:solidFill>
+                  <a:schemeClr val="tx1"/>
+                </a:solidFill>
+                <a:latin typeface="Arial" panose="020B0604020202020204" pitchFamily="34" charset="0"/>
+              </a:rPr>
+              <a:t>Participer à la digitalisation des processus de l’académie</a:t>
+            </a:r>
+            <a:r>
+              <a:rPr lang="fr-FR" altLang="fr-FR" sz="2000" dirty="0" smtClean="0">
+                <a:solidFill>
+                  <a:schemeClr val="tx1"/>
+                </a:solidFill>
+                <a:latin typeface="Arial" panose="020B0604020202020204" pitchFamily="34" charset="0"/>
+              </a:rPr>
+              <a:t>.</a:t>
+            </a:r>
+          </a:p>
+          <a:p>
+            <a:pPr defTabSz="914400" eaLnBrk="0" fontAlgn="base" hangingPunct="0">
+              <a:lnSpc>
+                <a:spcPct val="150000"/>
+              </a:lnSpc>
+              <a:spcBef>
+                <a:spcPct val="0"/>
+              </a:spcBef>
+              <a:spcAft>
+                <a:spcPct val="0"/>
+              </a:spcAft>
+              <a:buClrTx/>
+              <a:buSzTx/>
+            </a:pPr>
+            <a:r>
+              <a:rPr lang="fr-FR" altLang="fr-FR" sz="2000" dirty="0" smtClean="0">
+                <a:solidFill>
+                  <a:schemeClr val="tx1"/>
+                </a:solidFill>
+                <a:latin typeface="Arial" panose="020B0604020202020204" pitchFamily="34" charset="0"/>
+              </a:rPr>
+              <a:t> </a:t>
+            </a:r>
+            <a:r>
+              <a:rPr lang="fr-FR" altLang="fr-FR" sz="2000" dirty="0">
+                <a:solidFill>
+                  <a:schemeClr val="tx1"/>
+                </a:solidFill>
+                <a:latin typeface="Arial" panose="020B0604020202020204" pitchFamily="34" charset="0"/>
+              </a:rPr>
+              <a:t>Mettre en pratique les compétences acquises durant la </a:t>
+            </a:r>
+            <a:r>
+              <a:rPr lang="fr-FR" altLang="fr-FR" sz="2000" dirty="0" smtClean="0">
+                <a:solidFill>
+                  <a:schemeClr val="tx1"/>
+                </a:solidFill>
+                <a:latin typeface="Arial" panose="020B0604020202020204" pitchFamily="34" charset="0"/>
+              </a:rPr>
+              <a:t>formation.</a:t>
+            </a:r>
+          </a:p>
+          <a:p>
+            <a:pPr defTabSz="914400" eaLnBrk="0" fontAlgn="base" hangingPunct="0">
+              <a:lnSpc>
+                <a:spcPct val="150000"/>
+              </a:lnSpc>
+              <a:spcBef>
+                <a:spcPct val="0"/>
+              </a:spcBef>
+              <a:spcAft>
+                <a:spcPct val="0"/>
+              </a:spcAft>
+              <a:buClrTx/>
+              <a:buSzTx/>
+            </a:pPr>
+            <a:r>
+              <a:rPr lang="fr-FR" altLang="fr-FR" sz="2000" dirty="0" smtClean="0">
+                <a:solidFill>
+                  <a:schemeClr val="tx1"/>
+                </a:solidFill>
+                <a:latin typeface="Arial" panose="020B0604020202020204" pitchFamily="34" charset="0"/>
+              </a:rPr>
+              <a:t>Concevoir </a:t>
+            </a:r>
+            <a:r>
+              <a:rPr lang="fr-FR" altLang="fr-FR" sz="2000" dirty="0">
+                <a:solidFill>
+                  <a:schemeClr val="tx1"/>
+                </a:solidFill>
+                <a:latin typeface="Arial" panose="020B0604020202020204" pitchFamily="34" charset="0"/>
+              </a:rPr>
+              <a:t>une solution utile pour les administrateurs, les formateurs et les parents</a:t>
+            </a:r>
+            <a:r>
+              <a:rPr lang="fr-FR" altLang="fr-FR" sz="2000" dirty="0" smtClean="0">
+                <a:solidFill>
+                  <a:schemeClr val="tx1"/>
+                </a:solidFill>
+                <a:latin typeface="Arial" panose="020B0604020202020204" pitchFamily="34" charset="0"/>
+              </a:rPr>
+              <a:t>.</a:t>
+            </a:r>
+          </a:p>
+          <a:p>
+            <a:pPr defTabSz="914400" eaLnBrk="0" fontAlgn="base" hangingPunct="0">
+              <a:lnSpc>
+                <a:spcPct val="150000"/>
+              </a:lnSpc>
+              <a:spcBef>
+                <a:spcPct val="0"/>
+              </a:spcBef>
+              <a:spcAft>
+                <a:spcPct val="0"/>
+              </a:spcAft>
+              <a:buClrTx/>
+              <a:buSzTx/>
+            </a:pPr>
+            <a:r>
+              <a:rPr lang="fr-FR" altLang="fr-FR" sz="2000" dirty="0" smtClean="0">
+                <a:solidFill>
+                  <a:schemeClr val="tx1"/>
+                </a:solidFill>
+                <a:latin typeface="Arial" panose="020B0604020202020204" pitchFamily="34" charset="0"/>
+              </a:rPr>
+              <a:t> </a:t>
+            </a:r>
+            <a:r>
+              <a:rPr lang="fr-FR" altLang="fr-FR" sz="2000" dirty="0">
+                <a:solidFill>
+                  <a:schemeClr val="tx1"/>
+                </a:solidFill>
+                <a:latin typeface="Arial" panose="020B0604020202020204" pitchFamily="34" charset="0"/>
+              </a:rPr>
+              <a:t>Développer une application répondant à un contexte professionnel concret.</a:t>
+            </a:r>
+            <a:endParaRPr lang="fr-FR" altLang="fr-FR" sz="2000" dirty="0" smtClean="0">
               <a:solidFill>
                 <a:schemeClr val="tx1"/>
               </a:solidFill>
@@ -10885,6 +11329,13 @@
   <p:clrMapOvr>
     <a:masterClrMapping/>
   </p:clrMapOvr>
+  <p:timing>
+    <p:tnLst>
+      <p:par>
+        <p:cTn id="1" dur="indefinite" restart="never" nodeType="tmRoot"/>
+      </p:par>
+    </p:tnLst>
+  </p:timing>
 </p:sld>
 </file>
 
@@ -10970,8 +11421,8 @@
         </p:nvSpPr>
         <p:spPr bwMode="auto">
           <a:xfrm>
-            <a:off x="477636" y="1938893"/>
-            <a:ext cx="11236728" cy="4651979"/>
+            <a:off x="477636" y="2141226"/>
+            <a:ext cx="11236728" cy="4247317"/>
           </a:xfrm>
           <a:prstGeom prst="rect">
             <a:avLst/>
@@ -11041,11 +11492,20 @@
                 </a:solidFill>
                 <a:latin typeface="Arial" panose="020B0604020202020204" pitchFamily="34" charset="0"/>
               </a:rPr>
-              <a:t>Objectifs visés</a:t>
-            </a:r>
-          </a:p>
-          <a:p>
-            <a:pPr lvl="0" defTabSz="914400" eaLnBrk="0" fontAlgn="base" hangingPunct="0">
+              <a:t>Objectifs </a:t>
+            </a:r>
+            <a:r>
+              <a:rPr lang="fr-FR" altLang="fr-FR" sz="2000" b="1" dirty="0" smtClean="0">
+                <a:solidFill>
+                  <a:schemeClr val="tx1"/>
+                </a:solidFill>
+                <a:latin typeface="Arial" panose="020B0604020202020204" pitchFamily="34" charset="0"/>
+              </a:rPr>
+              <a:t>visés</a:t>
+            </a:r>
+          </a:p>
+          <a:p>
+            <a:pPr marL="0" lvl="0" indent="0" defTabSz="914400" eaLnBrk="0" fontAlgn="base" hangingPunct="0">
               <a:lnSpc>
                 <a:spcPct val="150000"/>
               </a:lnSpc>
@@ -11057,21 +11517,17 @@
               </a:spcAft>
               <a:buClrTx/>
               <a:buSzTx/>
-              <a:buFont typeface="Wingdings" panose="05000000000000000000" pitchFamily="2" charset="2"/>
-              <a:buChar char="Ø"/>
+              <a:buNone/>
             </a:pPr>
-            <a:r>
-              <a:rPr lang="fr-FR" altLang="fr-FR" sz="2000" dirty="0">
-                <a:solidFill>
-                  <a:schemeClr val="tx1"/>
-                </a:solidFill>
-                <a:latin typeface="Arial" panose="020B0604020202020204" pitchFamily="34" charset="0"/>
-              </a:rPr>
-              <a:t>Centraliser les informations administratives et pédagogiques dans une seule plateforme</a:t>
-            </a:r>
-          </a:p>
-          <a:p>
-            <a:pPr lvl="0" defTabSz="914400" eaLnBrk="0" fontAlgn="base" hangingPunct="0">
+            <a:endParaRPr lang="fr-FR" altLang="fr-FR" sz="2000" b="1" dirty="0" smtClean="0">
+              <a:solidFill>
+                <a:schemeClr val="tx1"/>
+              </a:solidFill>
+              <a:latin typeface="Arial" panose="020B0604020202020204" pitchFamily="34" charset="0"/>
+            </a:endParaRPr>
+          </a:p>
+          <a:p>
+            <a:pPr defTabSz="914400" eaLnBrk="0" fontAlgn="base" hangingPunct="0">
               <a:lnSpc>
                 <a:spcPct val="150000"/>
               </a:lnSpc>
@@ -11083,21 +11539,37 @@
               </a:spcAft>
               <a:buClrTx/>
               <a:buSzTx/>
-              <a:buFont typeface="Wingdings" panose="05000000000000000000" pitchFamily="2" charset="2"/>
-              <a:buChar char="Ø"/>
             </a:pPr>
             <a:r>
-              <a:rPr lang="fr-FR" altLang="fr-FR" sz="2000" dirty="0">
+              <a:rPr lang="fr-FR" altLang="fr-FR" sz="2000" dirty="0" smtClean="0">
                 <a:solidFill>
                   <a:schemeClr val="tx1"/>
                 </a:solidFill>
                 <a:latin typeface="Arial" panose="020B0604020202020204" pitchFamily="34" charset="0"/>
               </a:rPr>
-              <a:t> Permettre aux parents de réserver des ateliers en ligne.</a:t>
-            </a:r>
-          </a:p>
-          <a:p>
-            <a:pPr lvl="0" defTabSz="914400" eaLnBrk="0" fontAlgn="base" hangingPunct="0">
+              <a:t>Moderniser </a:t>
+            </a:r>
+            <a:r>
+              <a:rPr lang="fr-FR" altLang="fr-FR" sz="2000" dirty="0">
+                <a:solidFill>
+                  <a:schemeClr val="tx1"/>
+                </a:solidFill>
+                <a:latin typeface="Arial" panose="020B0604020202020204" pitchFamily="34" charset="0"/>
+              </a:rPr>
+              <a:t>la gestion des ateliers au sein de l’académie</a:t>
+            </a:r>
+            <a:r>
+              <a:rPr lang="fr-FR" altLang="fr-FR" sz="2000" dirty="0" smtClean="0">
+                <a:solidFill>
+                  <a:schemeClr val="tx1"/>
+                </a:solidFill>
+                <a:latin typeface="Arial" panose="020B0604020202020204" pitchFamily="34" charset="0"/>
+              </a:rPr>
+              <a:t>.</a:t>
+            </a:r>
+          </a:p>
+          <a:p>
+            <a:pPr defTabSz="914400" eaLnBrk="0" fontAlgn="base" hangingPunct="0">
               <a:lnSpc>
                 <a:spcPct val="150000"/>
               </a:lnSpc>
@@ -11109,21 +11581,37 @@
               </a:spcAft>
               <a:buClrTx/>
               <a:buSzTx/>
-              <a:buFont typeface="Wingdings" panose="05000000000000000000" pitchFamily="2" charset="2"/>
-              <a:buChar char="Ø"/>
             </a:pPr>
             <a:r>
-              <a:rPr lang="fr-FR" altLang="fr-FR" sz="2000" dirty="0">
+              <a:rPr lang="fr-FR" altLang="fr-FR" sz="2000" dirty="0" smtClean="0">
                 <a:solidFill>
                   <a:schemeClr val="tx1"/>
                 </a:solidFill>
                 <a:latin typeface="Arial" panose="020B0604020202020204" pitchFamily="34" charset="0"/>
               </a:rPr>
-              <a:t> Faciliter le suivi des réservations grâce aux différents statuts (En attente, Payé, Annulée).</a:t>
-            </a:r>
-          </a:p>
-          <a:p>
-            <a:pPr lvl="0" defTabSz="914400" eaLnBrk="0" fontAlgn="base" hangingPunct="0">
+              <a:t> </a:t>
+            </a:r>
+            <a:r>
+              <a:rPr lang="fr-FR" altLang="fr-FR" sz="2000" dirty="0">
+                <a:solidFill>
+                  <a:schemeClr val="tx1"/>
+                </a:solidFill>
+                <a:latin typeface="Arial" panose="020B0604020202020204" pitchFamily="34" charset="0"/>
+              </a:rPr>
+              <a:t>Améliorer l’organisation administrative et </a:t>
+            </a:r>
+            <a:r>
+              <a:rPr lang="fr-FR" altLang="fr-FR" sz="2000" dirty="0" smtClean="0">
+                <a:solidFill>
+                  <a:schemeClr val="tx1"/>
+                </a:solidFill>
+                <a:latin typeface="Arial" panose="020B0604020202020204" pitchFamily="34" charset="0"/>
+              </a:rPr>
+              <a:t>pédagogique.</a:t>
+            </a:r>
+          </a:p>
+          <a:p>
+            <a:pPr defTabSz="914400" eaLnBrk="0" fontAlgn="base" hangingPunct="0">
               <a:lnSpc>
                 <a:spcPct val="150000"/>
               </a:lnSpc>
@@ -11135,21 +11623,37 @@
               </a:spcAft>
               <a:buClrTx/>
               <a:buSzTx/>
-              <a:buFont typeface="Wingdings" panose="05000000000000000000" pitchFamily="2" charset="2"/>
-              <a:buChar char="Ø"/>
             </a:pPr>
             <a:r>
-              <a:rPr lang="fr-FR" altLang="fr-FR" sz="2000" dirty="0">
+              <a:rPr lang="fr-FR" altLang="fr-FR" sz="2000" dirty="0" smtClean="0">
                 <a:solidFill>
                   <a:schemeClr val="tx1"/>
                 </a:solidFill>
                 <a:latin typeface="Arial" panose="020B0604020202020204" pitchFamily="34" charset="0"/>
               </a:rPr>
-              <a:t>Réduire les erreurs liées à la gestion manuelle des inscriptions.</a:t>
-            </a:r>
-          </a:p>
-          <a:p>
-            <a:pPr lvl="0" defTabSz="914400" eaLnBrk="0" fontAlgn="base" hangingPunct="0">
+              <a:t>Réduire </a:t>
+            </a:r>
+            <a:r>
+              <a:rPr lang="fr-FR" altLang="fr-FR" sz="2000" dirty="0">
+                <a:solidFill>
+                  <a:schemeClr val="tx1"/>
+                </a:solidFill>
+                <a:latin typeface="Arial" panose="020B0604020202020204" pitchFamily="34" charset="0"/>
+              </a:rPr>
+              <a:t>les erreurs liées aux traitements manuels</a:t>
+            </a:r>
+            <a:r>
+              <a:rPr lang="fr-FR" altLang="fr-FR" sz="2000" dirty="0" smtClean="0">
+                <a:solidFill>
+                  <a:schemeClr val="tx1"/>
+                </a:solidFill>
+                <a:latin typeface="Arial" panose="020B0604020202020204" pitchFamily="34" charset="0"/>
+              </a:rPr>
+              <a:t>.</a:t>
+            </a:r>
+          </a:p>
+          <a:p>
+            <a:pPr defTabSz="914400" eaLnBrk="0" fontAlgn="base" hangingPunct="0">
               <a:lnSpc>
                 <a:spcPct val="150000"/>
               </a:lnSpc>
@@ -11161,21 +11665,37 @@
               </a:spcAft>
               <a:buClrTx/>
               <a:buSzTx/>
-              <a:buFont typeface="Wingdings" panose="05000000000000000000" pitchFamily="2" charset="2"/>
-              <a:buChar char="Ø"/>
             </a:pPr>
             <a:r>
-              <a:rPr lang="fr-FR" altLang="fr-FR" sz="2000" dirty="0">
+              <a:rPr lang="fr-FR" altLang="fr-FR" sz="2000" dirty="0" smtClean="0">
                 <a:solidFill>
                   <a:schemeClr val="tx1"/>
                 </a:solidFill>
                 <a:latin typeface="Arial" panose="020B0604020202020204" pitchFamily="34" charset="0"/>
               </a:rPr>
-              <a:t>Simplifier le suivi pédagogique des élèves.- </a:t>
-            </a:r>
-          </a:p>
-          <a:p>
-            <a:pPr lvl="0" defTabSz="914400" eaLnBrk="0" fontAlgn="base" hangingPunct="0">
+              <a:t> </a:t>
+            </a:r>
+            <a:r>
+              <a:rPr lang="fr-FR" altLang="fr-FR" sz="2000" dirty="0">
+                <a:solidFill>
+                  <a:schemeClr val="tx1"/>
+                </a:solidFill>
+                <a:latin typeface="Arial" panose="020B0604020202020204" pitchFamily="34" charset="0"/>
+              </a:rPr>
+              <a:t>Optimiser le temps de gestion des </a:t>
+            </a:r>
+            <a:r>
+              <a:rPr lang="fr-FR" altLang="fr-FR" sz="2000" dirty="0" smtClean="0">
+                <a:solidFill>
+                  <a:schemeClr val="tx1"/>
+                </a:solidFill>
+                <a:latin typeface="Arial" panose="020B0604020202020204" pitchFamily="34" charset="0"/>
+              </a:rPr>
+              <a:t>réservations.</a:t>
+            </a:r>
+          </a:p>
+          <a:p>
+            <a:pPr defTabSz="914400" eaLnBrk="0" fontAlgn="base" hangingPunct="0">
               <a:lnSpc>
                 <a:spcPct val="150000"/>
               </a:lnSpc>
@@ -11187,21 +11707,37 @@
               </a:spcAft>
               <a:buClrTx/>
               <a:buSzTx/>
-              <a:buFont typeface="Wingdings" panose="05000000000000000000" pitchFamily="2" charset="2"/>
-              <a:buChar char="Ø"/>
             </a:pPr>
             <a:r>
-              <a:rPr lang="fr-FR" altLang="fr-FR" sz="2000" dirty="0">
+              <a:rPr lang="fr-FR" altLang="fr-FR" sz="2000" dirty="0" smtClean="0">
                 <a:solidFill>
                   <a:schemeClr val="tx1"/>
                 </a:solidFill>
                 <a:latin typeface="Arial" panose="020B0604020202020204" pitchFamily="34" charset="0"/>
               </a:rPr>
-              <a:t>Générer automatiquement des rapports PDF professionnels.</a:t>
-            </a:r>
-          </a:p>
-          <a:p>
-            <a:pPr lvl="0" defTabSz="914400" eaLnBrk="0" fontAlgn="base" hangingPunct="0">
+              <a:t>Faciliter </a:t>
+            </a:r>
+            <a:r>
+              <a:rPr lang="fr-FR" altLang="fr-FR" sz="2000" dirty="0">
+                <a:solidFill>
+                  <a:schemeClr val="tx1"/>
+                </a:solidFill>
+                <a:latin typeface="Arial" panose="020B0604020202020204" pitchFamily="34" charset="0"/>
+              </a:rPr>
+              <a:t>la communication entre l’académie et les parents</a:t>
+            </a:r>
+            <a:r>
+              <a:rPr lang="fr-FR" altLang="fr-FR" sz="2000" dirty="0" smtClean="0">
+                <a:solidFill>
+                  <a:schemeClr val="tx1"/>
+                </a:solidFill>
+                <a:latin typeface="Arial" panose="020B0604020202020204" pitchFamily="34" charset="0"/>
+              </a:rPr>
+              <a:t>.</a:t>
+            </a:r>
+          </a:p>
+          <a:p>
+            <a:pPr defTabSz="914400" eaLnBrk="0" fontAlgn="base" hangingPunct="0">
               <a:lnSpc>
                 <a:spcPct val="150000"/>
               </a:lnSpc>
@@ -11213,21 +11749,37 @@
               </a:spcAft>
               <a:buClrTx/>
               <a:buSzTx/>
-              <a:buFont typeface="Wingdings" panose="05000000000000000000" pitchFamily="2" charset="2"/>
-              <a:buChar char="Ø"/>
             </a:pPr>
             <a:r>
-              <a:rPr lang="fr-FR" altLang="fr-FR" sz="2000" dirty="0">
+              <a:rPr lang="fr-FR" altLang="fr-FR" sz="2000" dirty="0" smtClean="0">
                 <a:solidFill>
                   <a:schemeClr val="tx1"/>
                 </a:solidFill>
                 <a:latin typeface="Arial" panose="020B0604020202020204" pitchFamily="34" charset="0"/>
               </a:rPr>
-              <a:t> Envoyer les rapports aux parents par courrier électronique.</a:t>
-            </a:r>
-          </a:p>
-          <a:p>
-            <a:pPr lvl="0" defTabSz="914400" eaLnBrk="0" fontAlgn="base" hangingPunct="0">
+              <a:t> </a:t>
+            </a:r>
+            <a:r>
+              <a:rPr lang="fr-FR" altLang="fr-FR" sz="2000" dirty="0">
+                <a:solidFill>
+                  <a:schemeClr val="tx1"/>
+                </a:solidFill>
+                <a:latin typeface="Arial" panose="020B0604020202020204" pitchFamily="34" charset="0"/>
+              </a:rPr>
+              <a:t>Assurer un meilleur suivi des élèves</a:t>
+            </a:r>
+            <a:r>
+              <a:rPr lang="fr-FR" altLang="fr-FR" sz="2000" dirty="0" smtClean="0">
+                <a:solidFill>
+                  <a:schemeClr val="tx1"/>
+                </a:solidFill>
+                <a:latin typeface="Arial" panose="020B0604020202020204" pitchFamily="34" charset="0"/>
+              </a:rPr>
+              <a:t>.</a:t>
+            </a:r>
+          </a:p>
+          <a:p>
+            <a:pPr defTabSz="914400" eaLnBrk="0" fontAlgn="base" hangingPunct="0">
               <a:lnSpc>
                 <a:spcPct val="150000"/>
               </a:lnSpc>
@@ -11239,35 +11791,16 @@
               </a:spcAft>
               <a:buClrTx/>
               <a:buSzTx/>
-              <a:buFont typeface="Wingdings" panose="05000000000000000000" pitchFamily="2" charset="2"/>
-              <a:buChar char="Ø"/>
             </a:pPr>
             <a:r>
-              <a:rPr lang="fr-FR" altLang="fr-FR" sz="2000" dirty="0">
+              <a:rPr lang="fr-FR" altLang="fr-FR" sz="2000" dirty="0" smtClean="0">
                 <a:solidFill>
                   <a:schemeClr val="tx1"/>
                 </a:solidFill>
                 <a:latin typeface="Arial" panose="020B0604020202020204" pitchFamily="34" charset="0"/>
               </a:rPr>
-              <a:t>Conserver un historique des rapports générés.-</a:t>
-            </a:r>
-          </a:p>
-          <a:p>
-            <a:pPr lvl="0" defTabSz="914400" eaLnBrk="0" fontAlgn="base" hangingPunct="0">
-              <a:lnSpc>
-                <a:spcPct val="150000"/>
-              </a:lnSpc>
-              <a:spcBef>
-                <a:spcPct val="0"/>
-              </a:spcBef>
-              <a:spcAft>
-                <a:spcPct val="0"/>
-              </a:spcAft>
-              <a:buClrTx/>
-              <a:buSzTx/>
-              <a:buFont typeface="Wingdings" panose="05000000000000000000" pitchFamily="2" charset="2"/>
-              <a:buChar char="Ø"/>
-            </a:pPr>
+              <a:t> </a:t>
+            </a:r>
             <a:r>
               <a:rPr lang="fr-FR" altLang="fr-FR" sz="2000" dirty="0">
                 <a:solidFill>
@@ -11275,12 +11808,9 @@
                 </a:solidFill>
                 <a:latin typeface="Arial" panose="020B0604020202020204" pitchFamily="34" charset="0"/>
               </a:rPr>
-              <a:t> Accélérer les processus administratifs et améliorer l’organisation générale de l’académie.</a:t>
-            </a:r>
-            <a:endParaRPr kumimoji="0" lang="fr-FR" altLang="fr-FR" sz="2000" i="0" u="none" strike="noStrike" cap="none" normalizeH="0" baseline="0" dirty="0">
-              <a:ln>
-                <a:noFill/>
-              </a:ln>
+              <a:t>Mettre en place une solution fiable et centralisée.</a:t>
+            </a:r>
+            <a:endParaRPr lang="fr-FR" altLang="fr-FR" sz="2000" dirty="0">
               <a:solidFill>
                 <a:schemeClr val="tx1"/>
               </a:solidFill>
@@ -11299,6 +11829,13 @@
   <p:clrMapOvr>
     <a:masterClrMapping/>
   </p:clrMapOvr>
+  <p:timing>
+    <p:tnLst>
+      <p:par>
+        <p:cTn id="1" dur="indefinite" restart="never" nodeType="tmRoot"/>
+      </p:par>
+    </p:tnLst>
+  </p:timing>
 </p:sld>
 </file>
 
@@ -11545,6 +12082,13 @@
   <p:clrMapOvr>
     <a:masterClrMapping/>
   </p:clrMapOvr>
+  <p:timing>
+    <p:tnLst>
+      <p:par>
+        <p:cTn id="1" dur="indefinite" restart="never" nodeType="tmRoot"/>
+      </p:par>
+    </p:tnLst>
+  </p:timing>
 </p:sld>
 </file>
 
@@ -11621,8 +12165,8 @@
         </p:nvSpPr>
         <p:spPr>
           <a:xfrm>
-            <a:off x="518264" y="2345593"/>
-            <a:ext cx="11155471" cy="4385816"/>
+            <a:off x="511479" y="2172172"/>
+            <a:ext cx="11155471" cy="4431983"/>
           </a:xfrm>
           <a:prstGeom prst="rect">
             <a:avLst/>
@@ -11653,26 +12197,27 @@
               </a:lnSpc>
             </a:pPr>
             <a:r>
-              <a:rPr lang="fr-FR" sz="2000" dirty="0" smtClean="0"/>
-              <a:t>L’administrateur dispose </a:t>
-            </a:r>
-            <a:r>
               <a:rPr lang="fr-FR" sz="2000" dirty="0"/>
-              <a:t>d’un espace dédié lui permettant de créer, modifier et supprimer des ateliers. Chaque atelier contient plusieurs informations telles que le titre, la description, le prix, la capacité d’accueil, la tranche d’âge concernée, les dates ainsi qu’une image de présentation</a:t>
-            </a:r>
-            <a:r>
-              <a:rPr lang="fr-FR" dirty="0"/>
-              <a:t>.</a:t>
-            </a:r>
-          </a:p>
-          <a:p>
-            <a:pPr marL="342900" indent="-342900">
-              <a:lnSpc>
-                <a:spcPct val="150000"/>
-              </a:lnSpc>
-              <a:buAutoNum type="arabicPeriod"/>
-            </a:pPr>
-            <a:endParaRPr lang="fr-FR" dirty="0"/>
+              <a:t>• Création des ateliers</a:t>
+            </a:r>
+            <a:br>
+              <a:rPr lang="fr-FR" sz="2000" dirty="0"/>
+            </a:br>
+            <a:r>
+              <a:rPr lang="fr-FR" sz="2000" dirty="0"/>
+              <a:t>• Modification des ateliers</a:t>
+            </a:r>
+            <a:br>
+              <a:rPr lang="fr-FR" sz="2000" dirty="0"/>
+            </a:br>
+            <a:r>
+              <a:rPr lang="fr-FR" sz="2000" dirty="0"/>
+              <a:t>• Suppression des ateliers</a:t>
+            </a:r>
+            <a:br>
+              <a:rPr lang="fr-FR" sz="2000" dirty="0"/>
+            </a:br>
+            <a:endParaRPr lang="fr-FR" sz="2000" dirty="0" smtClean="0"/>
           </a:p>
           <a:p>
             <a:pPr>
@@ -11681,8 +12226,12 @@
               </a:lnSpc>
             </a:pPr>
             <a:r>
+              <a:rPr lang="fr-FR" sz="2400" dirty="0" smtClean="0"/>
+              <a:t>2</a:t>
+            </a:r>
+            <a:r>
               <a:rPr lang="fr-FR" sz="2400" dirty="0"/>
-              <a:t>2. </a:t>
+              <a:t>. </a:t>
             </a:r>
             <a:r>
               <a:rPr lang="fr-FR" sz="2400" b="1" dirty="0"/>
@@ -11696,9 +12245,29 @@
               </a:lnSpc>
             </a:pPr>
             <a:r>
-              <a:rPr lang="fr-FR" sz="2000" dirty="0"/>
-              <a:t>Les parents peuvent créer un compte, accéder à leur espace personnel et consulter les ateliers disponibles. Grâce à la fonctionnalité « Réserver maintenant », ils peuvent effectuer une demande de réservation et suivre son évolution depuis leur tableau de bord</a:t>
-            </a:r>
+              <a:rPr lang="fr-FR" sz="2000" dirty="0" smtClean="0"/>
+              <a:t>Les parents peuvent </a:t>
+            </a:r>
+            <a:r>
+              <a:rPr lang="fr-FR" sz="2000" b="1" dirty="0" smtClean="0"/>
+              <a:t>consulter</a:t>
+            </a:r>
+            <a:r>
+              <a:rPr lang="fr-FR" sz="2000" dirty="0" smtClean="0"/>
+              <a:t> les ateliers disponibles. </a:t>
+            </a:r>
+          </a:p>
+          <a:p>
+            <a:pPr>
+              <a:lnSpc>
+                <a:spcPct val="150000"/>
+              </a:lnSpc>
+            </a:pPr>
+            <a:r>
+              <a:rPr lang="fr-FR" sz="2000" dirty="0" smtClean="0"/>
+              <a:t>Grâce à la fonctionnalité « Réserver maintenant », ils peuvent effectuer une demande de réservation et suivre son évolution depuis leur tableau de bord</a:t>
+            </a:r>
+            <a:endParaRPr lang="fr-FR" sz="2000" dirty="0"/>
           </a:p>
         </p:txBody>
       </p:sp>
@@ -11712,6 +12281,13 @@
   <p:clrMapOvr>
     <a:masterClrMapping/>
   </p:clrMapOvr>
+  <p:timing>
+    <p:tnLst>
+      <p:par>
+        <p:cTn id="1" dur="indefinite" restart="never" nodeType="tmRoot"/>
+      </p:par>
+    </p:tnLst>
+  </p:timing>
 </p:sld>
 </file>
 
@@ -11788,8 +12364,8 @@
         </p:nvSpPr>
         <p:spPr>
           <a:xfrm>
-            <a:off x="518264" y="2345593"/>
-            <a:ext cx="11155471" cy="3916072"/>
+            <a:off x="511479" y="2093345"/>
+            <a:ext cx="11155471" cy="4431983"/>
           </a:xfrm>
           <a:prstGeom prst="rect">
             <a:avLst/>
@@ -11824,7 +12400,11 @@
             </a:pPr>
             <a:r>
               <a:rPr lang="fr-FR" sz="2000" dirty="0"/>
-              <a:t>L’administrateur peut consulter l’ensemble des demandes de réservation et mettre à jour leur statut selon la situation administrative : En attente, Payé ou Annulée. Cette fonctionnalité facilite le suivi des inscriptions et améliore l’organisation des ateliers.</a:t>
+              <a:t>L’administrateur peut consulter l’ensemble des demandes de réservation et mettre à jour leur statut selon la situation administrative : En attente, Payé ou Annulée. Cette fonctionnalité facilite le suivi des inscriptions et améliore l’organisation des ateliers</a:t>
+            </a:r>
+            <a:r>
+              <a:rPr lang="fr-FR" sz="2000" dirty="0" smtClean="0"/>
+              <a:t>.</a:t>
             </a:r>
           </a:p>
           <a:p>
@@ -11833,14 +12413,7 @@
                 <a:spcPct val="150000"/>
               </a:lnSpc>
             </a:pPr>
-            <a:r>
-              <a:rPr lang="fr-FR" sz="2000" b="1" dirty="0"/>
-              <a:t>4</a:t>
-            </a:r>
-            <a:r>
-              <a:rPr lang="fr-FR" sz="2400" b="1" dirty="0"/>
-              <a:t>. Génération automatique des rapports pédagogiques PDF</a:t>
-            </a:r>
+            <a:endParaRPr lang="fr-FR" sz="2000" dirty="0"/>
           </a:p>
           <a:p>
             <a:pPr>
@@ -11849,8 +12422,31 @@
               </a:lnSpc>
             </a:pPr>
             <a:r>
+              <a:rPr lang="fr-FR" sz="2000" b="1" dirty="0"/>
+              <a:t>4</a:t>
+            </a:r>
+            <a:r>
+              <a:rPr lang="fr-FR" sz="2400" b="1" dirty="0"/>
+              <a:t>. Génération automatique des rapports pédagogiques PDF</a:t>
+            </a:r>
+          </a:p>
+          <a:p>
+            <a:pPr>
+              <a:lnSpc>
+                <a:spcPct val="150000"/>
+              </a:lnSpc>
+            </a:pPr>
+            <a:r>
               <a:rPr lang="fr-FR" sz="2000" dirty="0"/>
-              <a:t>Les formateurs disposent d’un module permettant de saisir les informations pédagogiques relatives à chaque élève (présence, compétences, observations et évaluations). Le système génère automatiquement un rapport professionnel au format PDF prêt à être téléchargé ou partagé.</a:t>
+              <a:t>Les formateurs </a:t>
+            </a:r>
+            <a:r>
+              <a:rPr lang="fr-FR" sz="2000" dirty="0" smtClean="0"/>
+              <a:t>permettant </a:t>
+            </a:r>
+            <a:r>
+              <a:rPr lang="fr-FR" sz="2000" dirty="0"/>
+              <a:t>de saisir les informations pédagogiques relatives à chaque élève (présence, compétences, observations et évaluations). Le système génère automatiquement un rapport professionnel au format PDF prêt à être téléchargé ou partagé.</a:t>
             </a:r>
           </a:p>
         </p:txBody>
@@ -11865,6 +12461,13 @@
   <p:clrMapOvr>
     <a:masterClrMapping/>
   </p:clrMapOvr>
+  <p:timing>
+    <p:tnLst>
+      <p:par>
+        <p:cTn id="1" dur="indefinite" restart="never" nodeType="tmRoot"/>
+      </p:par>
+    </p:tnLst>
+  </p:timing>
 </p:sld>
 </file>
 
@@ -11942,7 +12545,7 @@
         <p:spPr>
           <a:xfrm>
             <a:off x="518264" y="2345593"/>
-            <a:ext cx="11155471" cy="2438745"/>
+            <a:ext cx="11155471" cy="3508653"/>
           </a:xfrm>
           <a:prstGeom prst="rect">
             <a:avLst/>
@@ -11966,8 +12569,13 @@
             </a:r>
             <a:r>
               <a:rPr lang="fr-FR" sz="2400" b="1" dirty="0"/>
-              <a:t> Envoi des rapports et gestion des accès</a:t>
-            </a:r>
+              <a:t> Envoi des </a:t>
+            </a:r>
+            <a:r>
+              <a:rPr lang="fr-FR" sz="2400" b="1"/>
+              <a:t>rapports </a:t>
+            </a:r>
+            <a:endParaRPr lang="fr-FR" sz="2400" b="1" dirty="0" smtClean="0"/>
           </a:p>
           <a:p>
             <a:pPr>
@@ -11976,8 +12584,63 @@
               </a:lnSpc>
             </a:pPr>
             <a:r>
+              <a:rPr lang="fr-FR" sz="2000" dirty="0" smtClean="0"/>
+              <a:t>Une </a:t>
+            </a:r>
+            <a:r>
               <a:rPr lang="fr-FR" sz="2000" dirty="0"/>
-              <a:t>Une fois le rapport généré, le formateur peut l’envoyer directement au parent par courrier électronique avec le document PDF en pièce jointe. Le système intègre également une gestion des rôles (Administrateur, Parent et Formateur) garantissant que chaque utilisateur accède uniquement aux fonctionnalités et aux informations qui lui sont autorisées.</a:t>
+              <a:t>fois le rapport généré, le formateur peut </a:t>
+            </a:r>
+            <a:r>
+              <a:rPr lang="fr-FR" sz="2000" b="1" dirty="0"/>
+              <a:t>l’envoyer</a:t>
+            </a:r>
+            <a:r>
+              <a:rPr lang="fr-FR" sz="2000" dirty="0"/>
+              <a:t> directement au parent par courrier électronique avec le document PDF en pièce jointe. </a:t>
+            </a:r>
+            <a:endParaRPr lang="fr-FR" sz="2000" dirty="0" smtClean="0"/>
+          </a:p>
+          <a:p>
+            <a:pPr>
+              <a:lnSpc>
+                <a:spcPct val="150000"/>
+              </a:lnSpc>
+            </a:pPr>
+            <a:endParaRPr lang="fr-FR" sz="2000" dirty="0" smtClean="0"/>
+          </a:p>
+          <a:p>
+            <a:pPr>
+              <a:lnSpc>
+                <a:spcPct val="150000"/>
+              </a:lnSpc>
+            </a:pPr>
+            <a:r>
+              <a:rPr lang="fr-FR" sz="2400" b="1" dirty="0" smtClean="0">
+                <a:solidFill>
+                  <a:prstClr val="black"/>
+                </a:solidFill>
+              </a:rPr>
+              <a:t>6. </a:t>
+            </a:r>
+            <a:r>
+              <a:rPr lang="fr-FR" sz="2400" b="1" dirty="0"/>
+              <a:t>gestion des accès</a:t>
+            </a:r>
+          </a:p>
+          <a:p>
+            <a:pPr>
+              <a:lnSpc>
+                <a:spcPct val="150000"/>
+              </a:lnSpc>
+            </a:pPr>
+            <a:r>
+              <a:rPr lang="fr-FR" sz="2000" dirty="0" smtClean="0"/>
+              <a:t>Le </a:t>
+            </a:r>
+            <a:r>
+              <a:rPr lang="fr-FR" sz="2000" dirty="0"/>
+              <a:t>système intègre également une gestion des rôles (Administrateur, Parent et Formateur) garantissant que chaque utilisateur accède uniquement aux fonctionnalités et aux informations qui lui sont autorisées.</a:t>
             </a:r>
             <a:endParaRPr lang="fr-FR" sz="2000" dirty="0">
               <a:effectLst/>
@@ -11995,6 +12658,13 @@
   <p:clrMapOvr>
     <a:masterClrMapping/>
   </p:clrMapOvr>
+  <p:timing>
+    <p:tnLst>
+      <p:par>
+        <p:cTn id="1" dur="indefinite" restart="never" nodeType="tmRoot"/>
+      </p:par>
+    </p:tnLst>
+  </p:timing>
 </p:sld>
 </file>
 
